--- a/results/models/fig_models.pptx
+++ b/results/models/fig_models.pptx
@@ -1206,7 +1206,7 @@
                 </a:solidFill>
                 <a:latin typeface="Times New Roman"/>
               </a:rPr>
-              <a:t>(c)  Throughput</a:t>
+              <a:t>(c)  Prefill work</a:t>
             </a:r>
           </a:p>
         </c:rich>
@@ -1292,13 +1292,13 @@
                 <c:formatCode>General</c:formatCode>
                 <c:ptCount val="3"/>
                 <c:pt idx="0">
-                  <c:v>0</c:v>
+                  <c:v>1</c:v>
                 </c:pt>
                 <c:pt idx="1">
-                  <c:v>0</c:v>
+                  <c:v>1</c:v>
                 </c:pt>
                 <c:pt idx="2">
-                  <c:v>0</c:v>
+                  <c:v>1</c:v>
                 </c:pt>
               </c:numCache>
             </c:numRef>
@@ -1375,13 +1375,13 @@
                 <c:formatCode>General</c:formatCode>
                 <c:ptCount val="3"/>
                 <c:pt idx="0">
-                  <c:v>250.8</c:v>
+                  <c:v>0.458</c:v>
                 </c:pt>
                 <c:pt idx="1">
-                  <c:v>52.6</c:v>
+                  <c:v>0.672</c:v>
                 </c:pt>
                 <c:pt idx="2">
-                  <c:v>88.5</c:v>
+                  <c:v>0.452</c:v>
                 </c:pt>
               </c:numCache>
             </c:numRef>
@@ -1458,13 +1458,13 @@
                 <c:formatCode>General</c:formatCode>
                 <c:ptCount val="3"/>
                 <c:pt idx="0">
-                  <c:v>431.7</c:v>
+                  <c:v>0.044</c:v>
                 </c:pt>
                 <c:pt idx="1">
-                  <c:v>82.6</c:v>
+                  <c:v>0.409</c:v>
                 </c:pt>
                 <c:pt idx="2">
-                  <c:v>120.6</c:v>
+                  <c:v>0.225</c:v>
                 </c:pt>
               </c:numCache>
             </c:numRef>
@@ -1500,6 +1500,145 @@
         <c:axId val="2094734552"/>
         <c:axId val="2094734556"/>
       </c:barChart>
+      <c:lineChart>
+        <c:varyColors val="0"/>
+        <c:ser>
+          <c:idx val="3"/>
+          <c:order val="3"/>
+          <c:tx>
+            <c:strRef>
+              <c:f>Sheet1!$E$1</c:f>
+              <c:strCache>
+                <c:ptCount val="1"/>
+                <c:pt idx="0">
+                  <c:v>Baseline (Recompute = 1.0)</c:v>
+                </c:pt>
+              </c:strCache>
+            </c:strRef>
+          </c:tx>
+          <c:spPr>
+            <a:solidFill>
+              <a:srgbClr val="1A1A1A"/>
+            </a:solidFill>
+            <a:ln w="19050" cap="flat">
+              <a:solidFill>
+                <a:srgbClr val="1A1A1A"/>
+              </a:solidFill>
+              <a:prstDash val="dash"/>
+              <a:round/>
+            </a:ln>
+            <a:effectLst/>
+          </c:spPr>
+          <c:invertIfNegative val="0"/>
+          <c:dLbls>
+            <c:numFmt formatCode="#,##0" sourceLinked="0"/>
+            <c:txPr>
+              <a:bodyPr/>
+              <a:lstStyle/>
+              <a:p>
+                <a:pPr>
+                  <a:defRPr b="0" i="0" strike="noStrike" sz="1200" u="none">
+                    <a:solidFill>
+                      <a:srgbClr val="000000"/>
+                    </a:solidFill>
+                    <a:latin typeface="Arial"/>
+                  </a:defRPr>
+                </a:pPr>
+              </a:p>
+            </c:txPr>
+            <c:showLegendKey val="0"/>
+            <c:showVal val="0"/>
+            <c:showCatName val="0"/>
+            <c:showSerName val="0"/>
+            <c:showPercent val="0"/>
+            <c:showBubbleSize val="0"/>
+            <c:showLeaderLines val="0"/>
+          </c:dLbls>
+          <c:marker>
+            <c:symbol val="none"/>
+            <c:size val="6"/>
+            <c:spPr>
+              <a:solidFill>
+                <a:srgbClr val="1A1A1A"/>
+              </a:solidFill>
+              <a:ln w="9525" cap="flat">
+                <a:solidFill>
+                  <a:srgbClr val="1A1A1A"/>
+                </a:solidFill>
+                <a:prstDash val="solid"/>
+                <a:round/>
+              </a:ln>
+              <a:effectLst/>
+            </c:spPr>
+          </c:marker>
+          <c:cat>
+            <c:multiLvlStrRef>
+              <c:f>Sheet1!$A$2:$A$4</c:f>
+              <c:multiLvlStrCache>
+                <c:ptCount val="3"/>
+                <c:lvl>
+                  <c:pt idx="0">
+                    <c:v>Llama-3.1-8B</c:v>
+                  </c:pt>
+                  <c:pt idx="1">
+                    <c:v>Llama-2-13B</c:v>
+                  </c:pt>
+                  <c:pt idx="2">
+                    <c:v>Qwen3-14B</c:v>
+                  </c:pt>
+                </c:lvl>
+              </c:multiLvlStrCache>
+            </c:multiLvlStrRef>
+          </c:cat>
+          <c:val>
+            <c:numRef>
+              <c:f>Sheet1!$E$2:$E$4</c:f>
+              <c:numCache>
+                <c:formatCode>General</c:formatCode>
+                <c:ptCount val="3"/>
+                <c:pt idx="0">
+                  <c:v>1</c:v>
+                </c:pt>
+                <c:pt idx="1">
+                  <c:v>1</c:v>
+                </c:pt>
+                <c:pt idx="2">
+                  <c:v>1</c:v>
+                </c:pt>
+              </c:numCache>
+            </c:numRef>
+          </c:val>
+          <c:smooth val="0"/>
+        </c:ser>
+        <c:dLbls>
+          <c:numFmt formatCode="#,##0" sourceLinked="0"/>
+          <c:txPr>
+            <a:bodyPr/>
+            <a:lstStyle/>
+            <a:p>
+              <a:pPr>
+                <a:defRPr b="0" i="0" strike="noStrike" sz="1200" u="none">
+                  <a:solidFill>
+                    <a:srgbClr val="000000"/>
+                  </a:solidFill>
+                  <a:latin typeface="Arial"/>
+                </a:defRPr>
+              </a:pPr>
+            </a:p>
+          </c:txPr>
+          <c:showLegendKey val="0"/>
+          <c:showVal val="0"/>
+          <c:showCatName val="0"/>
+          <c:showSerName val="0"/>
+          <c:showPercent val="0"/>
+          <c:showBubbleSize val="0"/>
+          <c:showLeaderLines val="0"/>
+        </c:dLbls>
+        <c:marker val="1"/>
+        <c:axId val="2094734554"/>
+        <c:axId val="2094734552"/>
+        <c:axId val="2094734556"/>
+      </c:lineChart>
       <c:catAx>
         <c:axId val="2094734554"/>
         <c:scaling>
@@ -1545,6 +1684,7 @@
         <c:axId val="2094734552"/>
         <c:scaling>
           <c:orientation val="minMax"/>
+          <c:max val="1.25"/>
           <c:min val="0"/>
         </c:scaling>
         <c:delete val="0"/>
@@ -1581,7 +1721,7 @@
                     </a:solidFill>
                     <a:latin typeface="Times New Roman"/>
                   </a:rPr>
-                  <a:t>Throughput (t/s)</a:t>
+                  <a:t>Normalized Prefill Work</a:t>
                 </a:r>
               </a:p>
             </c:rich>
@@ -1620,6 +1760,7 @@
         <c:crossAx val="2094734554"/>
         <c:crosses val="autoZero"/>
         <c:crossBetween val="between"/>
+        <c:majorUnit val="0.25"/>
       </c:valAx>
       <c:spPr>
         <a:noFill/>
@@ -2506,8 +2647,8 @@
             <a:r>
               <a:rPr lang="en-US" dirty="0"/>
               <a:t>All four are native PowerPoint charts: right-click &gt; Edit Data to change values, or the Chart Design / Format tabs for colours and axes.
-TTFT is normalised to Recompute within each model, because absolute TTFT is set mostly by model size and would invite comparison across models.
-Recompute has no cache, so its hit rate and cache-served throughput are 0 by construction, not missing data.
+TTFT and prefill work are normalised to Recompute within each model, because their absolute values are set mostly by model size and would invite comparison across models. In both, lower is better and the dashed line is Recompute.
+Panel (c) plots prefill work rather than cache-served throughput because Recompute serves 0 tokens from cache by construction (it has no cache), which cannot be a normalisation denominator. Its hit rate is 0 for the same reason -- not missing data.
 Source: results/models/{llama8b,llama13b,qwen14b}/table.json</a:t>
             </a:r>
             <a:endParaRPr lang="en-US" dirty="0"/>
@@ -3267,7 +3408,7 @@
                 <a:ea typeface="Times New Roman" pitchFamily="34" charset="-122"/>
                 <a:cs typeface="Times New Roman" pitchFamily="34" charset="-120"/>
               </a:rPr>
-              <a:t>1.72×</a:t>
+              <a:t>10.32×</a:t>
             </a:r>
             <a:endParaRPr lang="en-US" sz="1200" dirty="0"/>
           </a:p>
@@ -3306,7 +3447,7 @@
                 <a:ea typeface="Times New Roman" pitchFamily="34" charset="-122"/>
                 <a:cs typeface="Times New Roman" pitchFamily="34" charset="-120"/>
               </a:rPr>
-              <a:t>1.57×</a:t>
+              <a:t>1.64×</a:t>
             </a:r>
             <a:endParaRPr lang="en-US" sz="1200" dirty="0"/>
           </a:p>
@@ -3345,7 +3486,7 @@
                 <a:ea typeface="Times New Roman" pitchFamily="34" charset="-122"/>
                 <a:cs typeface="Times New Roman" pitchFamily="34" charset="-120"/>
               </a:rPr>
-              <a:t>1.36×</a:t>
+              <a:t>2.01×</a:t>
             </a:r>
             <a:endParaRPr lang="en-US" sz="1200" dirty="0"/>
           </a:p>
@@ -3709,7 +3850,7 @@
                 <a:ea typeface="Times New Roman" pitchFamily="34" charset="-122"/>
                 <a:cs typeface="Times New Roman" pitchFamily="34" charset="-120"/>
               </a:rPr>
-              <a:t>Hit rate, throughput and host DRAM improve on all three models. Normalized TTFT is the exception on Llama-2-13B (0.95×): its 4096-position limit caps conversations at four turns, so the re-prefill a hit avoids is small enough that the fetch does not pay for itself — the mechanism still works there (1.66× hit rate), it just has less to win.</a:t>
+              <a:t>Hit rate, prefill work and host DRAM improve on all three models. Normalized TTFT is the exception on Llama-2-13B (0.95×): its 4096-position limit caps conversations at four turns, so the re-prefill a hit avoids is small enough that the fetch does not pay for itself — the mechanism still works there (1.66× hit rate), it just has less to win.</a:t>
             </a:r>
             <a:endParaRPr lang="en-US" sz="1100" dirty="0"/>
           </a:p>

--- a/results/models/fig_models.pptx
+++ b/results/models/fig_models.pptx
@@ -1206,7 +1206,7 @@
                 </a:solidFill>
                 <a:latin typeface="Times New Roman"/>
               </a:rPr>
-              <a:t>(c)  Prefill work</a:t>
+              <a:t>(c)  Throughput</a:t>
             </a:r>
           </a:p>
         </c:rich>
@@ -1375,13 +1375,13 @@
                 <c:formatCode>General</c:formatCode>
                 <c:ptCount val="3"/>
                 <c:pt idx="0">
-                  <c:v>0.458</c:v>
+                  <c:v>1.013</c:v>
                 </c:pt>
                 <c:pt idx="1">
-                  <c:v>0.672</c:v>
+                  <c:v>0.994</c:v>
                 </c:pt>
                 <c:pt idx="2">
-                  <c:v>0.452</c:v>
+                  <c:v>1.002</c:v>
                 </c:pt>
               </c:numCache>
             </c:numRef>
@@ -1458,13 +1458,13 @@
                 <c:formatCode>General</c:formatCode>
                 <c:ptCount val="3"/>
                 <c:pt idx="0">
-                  <c:v>0.044</c:v>
+                  <c:v>1.008</c:v>
                 </c:pt>
                 <c:pt idx="1">
-                  <c:v>0.409</c:v>
+                  <c:v>0.999</c:v>
                 </c:pt>
                 <c:pt idx="2">
-                  <c:v>0.225</c:v>
+                  <c:v>1.001</c:v>
                 </c:pt>
               </c:numCache>
             </c:numRef>
@@ -1721,7 +1721,7 @@
                     </a:solidFill>
                     <a:latin typeface="Times New Roman"/>
                   </a:rPr>
-                  <a:t>Normalized Prefill Work</a:t>
+                  <a:t>Normalized Throughput</a:t>
                 </a:r>
               </a:p>
             </c:rich>
@@ -2647,8 +2647,9 @@
             <a:r>
               <a:rPr lang="en-US" dirty="0"/>
               <a:t>All four are native PowerPoint charts: right-click &gt; Edit Data to change values, or the Chart Design / Format tabs for colours and axes.
-TTFT and prefill work are normalised to Recompute within each model, because their absolute values are set mostly by model size and would invite comparison across models. In both, lower is better and the dashed line is Recompute.
-Panel (c) plots prefill work rather than cache-served throughput because Recompute serves 0 tokens from cache by construction (it has no cache), which cannot be a normalisation denominator. Its hit rate is 0 for the same reason -- not missing data.
+TTFT and throughput are normalised to Recompute within each model, because their absolute values are set mostly by model size and would invite comparison across models. The dashed line is Recompute.
+Panel (c) is FLAT ON PURPOSE: the benchmark is closed-loop, so all three arms are handed the same conversations at the same concurrency and finish in the same wall time. Throughput = fixed work / same wall, identical by construction. Use qps_sweep (open-loop, server-saturating) if the throughput claim needs to separate the arms.
+Recompute's hit rate is 0 by construction -- it has no cache -- not missing data.
 Source: results/models/{llama8b,llama13b,qwen14b}/table.json</a:t>
             </a:r>
             <a:endParaRPr lang="en-US" dirty="0"/>
@@ -3408,7 +3409,7 @@
                 <a:ea typeface="Times New Roman" pitchFamily="34" charset="-122"/>
                 <a:cs typeface="Times New Roman" pitchFamily="34" charset="-120"/>
               </a:rPr>
-              <a:t>10.32×</a:t>
+              <a:t>0.99×</a:t>
             </a:r>
             <a:endParaRPr lang="en-US" sz="1200" dirty="0"/>
           </a:p>
@@ -3447,7 +3448,7 @@
                 <a:ea typeface="Times New Roman" pitchFamily="34" charset="-122"/>
                 <a:cs typeface="Times New Roman" pitchFamily="34" charset="-120"/>
               </a:rPr>
-              <a:t>1.64×</a:t>
+              <a:t>1.00×</a:t>
             </a:r>
             <a:endParaRPr lang="en-US" sz="1200" dirty="0"/>
           </a:p>
@@ -3486,7 +3487,7 @@
                 <a:ea typeface="Times New Roman" pitchFamily="34" charset="-122"/>
                 <a:cs typeface="Times New Roman" pitchFamily="34" charset="-120"/>
               </a:rPr>
-              <a:t>2.01×</a:t>
+              <a:t>1.00×</a:t>
             </a:r>
             <a:endParaRPr lang="en-US" sz="1200" dirty="0"/>
           </a:p>
@@ -3850,7 +3851,7 @@
                 <a:ea typeface="Times New Roman" pitchFamily="34" charset="-122"/>
                 <a:cs typeface="Times New Roman" pitchFamily="34" charset="-120"/>
               </a:rPr>
-              <a:t>Hit rate, prefill work and host DRAM improve on all three models. Normalized TTFT is the exception on Llama-2-13B (0.95×): its 4096-position limit caps conversations at four turns, so the re-prefill a hit avoids is small enough that the fetch does not pay for itself — the mechanism still works there (1.66× hit rate), it just has less to win.</a:t>
+              <a:t>Hit rate and host DRAM improve on all three models. Throughput is flat by construction — the benchmark is closed-loop, so every arm does the same work in the same wall time. Normalized TTFT is the exception on Llama-2-13B (0.95×): its 4096-position limit caps conversations at four turns, so the re-prefill a hit avoids is small enough that the fetch does not pay for itself — the mechanism still works there (1.66× hit rate), it just has less to win.</a:t>
             </a:r>
             <a:endParaRPr lang="en-US" sz="1100" dirty="0"/>
           </a:p>

--- a/results/models/fig_models.pptx
+++ b/results/models/fig_models.pptx
@@ -1206,613 +1206,7 @@
                 </a:solidFill>
                 <a:latin typeface="Times New Roman"/>
               </a:rPr>
-              <a:t>(c)  Throughput</a:t>
-            </a:r>
-          </a:p>
-        </c:rich>
-      </c:tx>
-      <c:layout/>
-      <c:overlay val="0"/>
-    </c:title>
-    <c:autoTitleDeleted val="0"/>
-    <c:plotArea>
-      <c:layout/>
-      <c:barChart>
-        <c:barDir val="col"/>
-        <c:grouping val="clustered"/>
-        <c:varyColors val="0"/>
-        <c:ser>
-          <c:idx val="0"/>
-          <c:order val="0"/>
-          <c:tx>
-            <c:strRef>
-              <c:f>Sheet1!$B$1</c:f>
-              <c:strCache>
-                <c:ptCount val="1"/>
-                <c:pt idx="0">
-                  <c:v>Recompute</c:v>
-                </c:pt>
-              </c:strCache>
-            </c:strRef>
-          </c:tx>
-          <c:spPr>
-            <a:solidFill>
-              <a:srgbClr val="BFC4C9"/>
-            </a:solidFill>
-            <a:effectLst/>
-          </c:spPr>
-          <c:invertIfNegative val="0"/>
-          <c:dLbls>
-            <c:numFmt formatCode="#,##0" sourceLinked="0"/>
-            <c:txPr>
-              <a:bodyPr/>
-              <a:lstStyle/>
-              <a:p>
-                <a:pPr>
-                  <a:defRPr b="0" i="0" strike="noStrike" sz="1200" u="none">
-                    <a:solidFill>
-                      <a:srgbClr val="000000"/>
-                    </a:solidFill>
-                    <a:latin typeface="Arial"/>
-                  </a:defRPr>
-                </a:pPr>
-              </a:p>
-            </c:txPr>
-            <c:showLegendKey val="0"/>
-            <c:showVal val="0"/>
-            <c:showCatName val="0"/>
-            <c:showSerName val="0"/>
-            <c:showPercent val="0"/>
-            <c:showBubbleSize val="0"/>
-            <c:showLeaderLines val="0"/>
-          </c:dLbls>
-          <c:cat>
-            <c:multiLvlStrRef>
-              <c:f>Sheet1!$A$2:$A$4</c:f>
-              <c:multiLvlStrCache>
-                <c:ptCount val="3"/>
-                <c:lvl>
-                  <c:pt idx="0">
-                    <c:v>Llama-3.1-8B</c:v>
-                  </c:pt>
-                  <c:pt idx="1">
-                    <c:v>Llama-2-13B</c:v>
-                  </c:pt>
-                  <c:pt idx="2">
-                    <c:v>Qwen3-14B</c:v>
-                  </c:pt>
-                </c:lvl>
-              </c:multiLvlStrCache>
-            </c:multiLvlStrRef>
-          </c:cat>
-          <c:val>
-            <c:numRef>
-              <c:f>Sheet1!$B$2:$B$4</c:f>
-              <c:numCache>
-                <c:formatCode>General</c:formatCode>
-                <c:ptCount val="3"/>
-                <c:pt idx="0">
-                  <c:v>1</c:v>
-                </c:pt>
-                <c:pt idx="1">
-                  <c:v>1</c:v>
-                </c:pt>
-                <c:pt idx="2">
-                  <c:v>1</c:v>
-                </c:pt>
-              </c:numCache>
-            </c:numRef>
-          </c:val>
-        </c:ser>
-        <c:ser>
-          <c:idx val="1"/>
-          <c:order val="1"/>
-          <c:tx>
-            <c:strRef>
-              <c:f>Sheet1!$C$1</c:f>
-              <c:strCache>
-                <c:ptCount val="1"/>
-                <c:pt idx="0">
-                  <c:v>SGLang</c:v>
-                </c:pt>
-              </c:strCache>
-            </c:strRef>
-          </c:tx>
-          <c:spPr>
-            <a:solidFill>
-              <a:srgbClr val="0072B2"/>
-            </a:solidFill>
-            <a:effectLst/>
-          </c:spPr>
-          <c:invertIfNegative val="0"/>
-          <c:dLbls>
-            <c:numFmt formatCode="#,##0" sourceLinked="0"/>
-            <c:txPr>
-              <a:bodyPr/>
-              <a:lstStyle/>
-              <a:p>
-                <a:pPr>
-                  <a:defRPr b="0" i="0" strike="noStrike" sz="1200" u="none">
-                    <a:solidFill>
-                      <a:srgbClr val="000000"/>
-                    </a:solidFill>
-                    <a:latin typeface="Arial"/>
-                  </a:defRPr>
-                </a:pPr>
-              </a:p>
-            </c:txPr>
-            <c:showLegendKey val="0"/>
-            <c:showVal val="0"/>
-            <c:showCatName val="0"/>
-            <c:showSerName val="0"/>
-            <c:showPercent val="0"/>
-            <c:showBubbleSize val="0"/>
-            <c:showLeaderLines val="0"/>
-          </c:dLbls>
-          <c:cat>
-            <c:multiLvlStrRef>
-              <c:f>Sheet1!$A$2:$A$4</c:f>
-              <c:multiLvlStrCache>
-                <c:ptCount val="3"/>
-                <c:lvl>
-                  <c:pt idx="0">
-                    <c:v>Llama-3.1-8B</c:v>
-                  </c:pt>
-                  <c:pt idx="1">
-                    <c:v>Llama-2-13B</c:v>
-                  </c:pt>
-                  <c:pt idx="2">
-                    <c:v>Qwen3-14B</c:v>
-                  </c:pt>
-                </c:lvl>
-              </c:multiLvlStrCache>
-            </c:multiLvlStrRef>
-          </c:cat>
-          <c:val>
-            <c:numRef>
-              <c:f>Sheet1!$C$2:$C$4</c:f>
-              <c:numCache>
-                <c:formatCode>General</c:formatCode>
-                <c:ptCount val="3"/>
-                <c:pt idx="0">
-                  <c:v>1.013</c:v>
-                </c:pt>
-                <c:pt idx="1">
-                  <c:v>0.994</c:v>
-                </c:pt>
-                <c:pt idx="2">
-                  <c:v>1.002</c:v>
-                </c:pt>
-              </c:numCache>
-            </c:numRef>
-          </c:val>
-        </c:ser>
-        <c:ser>
-          <c:idx val="2"/>
-          <c:order val="2"/>
-          <c:tx>
-            <c:strRef>
-              <c:f>Sheet1!$D$1</c:f>
-              <c:strCache>
-                <c:ptCount val="1"/>
-                <c:pt idx="0">
-                  <c:v>Ours</c:v>
-                </c:pt>
-              </c:strCache>
-            </c:strRef>
-          </c:tx>
-          <c:spPr>
-            <a:solidFill>
-              <a:srgbClr val="009E73"/>
-            </a:solidFill>
-            <a:effectLst/>
-          </c:spPr>
-          <c:invertIfNegative val="0"/>
-          <c:dLbls>
-            <c:numFmt formatCode="#,##0" sourceLinked="0"/>
-            <c:txPr>
-              <a:bodyPr/>
-              <a:lstStyle/>
-              <a:p>
-                <a:pPr>
-                  <a:defRPr b="0" i="0" strike="noStrike" sz="1200" u="none">
-                    <a:solidFill>
-                      <a:srgbClr val="000000"/>
-                    </a:solidFill>
-                    <a:latin typeface="Arial"/>
-                  </a:defRPr>
-                </a:pPr>
-              </a:p>
-            </c:txPr>
-            <c:showLegendKey val="0"/>
-            <c:showVal val="0"/>
-            <c:showCatName val="0"/>
-            <c:showSerName val="0"/>
-            <c:showPercent val="0"/>
-            <c:showBubbleSize val="0"/>
-            <c:showLeaderLines val="0"/>
-          </c:dLbls>
-          <c:cat>
-            <c:multiLvlStrRef>
-              <c:f>Sheet1!$A$2:$A$4</c:f>
-              <c:multiLvlStrCache>
-                <c:ptCount val="3"/>
-                <c:lvl>
-                  <c:pt idx="0">
-                    <c:v>Llama-3.1-8B</c:v>
-                  </c:pt>
-                  <c:pt idx="1">
-                    <c:v>Llama-2-13B</c:v>
-                  </c:pt>
-                  <c:pt idx="2">
-                    <c:v>Qwen3-14B</c:v>
-                  </c:pt>
-                </c:lvl>
-              </c:multiLvlStrCache>
-            </c:multiLvlStrRef>
-          </c:cat>
-          <c:val>
-            <c:numRef>
-              <c:f>Sheet1!$D$2:$D$4</c:f>
-              <c:numCache>
-                <c:formatCode>General</c:formatCode>
-                <c:ptCount val="3"/>
-                <c:pt idx="0">
-                  <c:v>1.008</c:v>
-                </c:pt>
-                <c:pt idx="1">
-                  <c:v>0.999</c:v>
-                </c:pt>
-                <c:pt idx="2">
-                  <c:v>1.001</c:v>
-                </c:pt>
-              </c:numCache>
-            </c:numRef>
-          </c:val>
-        </c:ser>
-        <c:dLbls>
-          <c:numFmt formatCode="#,##0" sourceLinked="0"/>
-          <c:txPr>
-            <a:bodyPr/>
-            <a:lstStyle/>
-            <a:p>
-              <a:pPr>
-                <a:defRPr b="0" i="0" strike="noStrike" sz="1200" u="none">
-                  <a:solidFill>
-                    <a:srgbClr val="000000"/>
-                  </a:solidFill>
-                  <a:latin typeface="Arial"/>
-                </a:defRPr>
-              </a:pPr>
-            </a:p>
-          </c:txPr>
-          <c:showLegendKey val="0"/>
-          <c:showVal val="0"/>
-          <c:showCatName val="0"/>
-          <c:showSerName val="0"/>
-          <c:showPercent val="0"/>
-          <c:showBubbleSize val="0"/>
-          <c:showLeaderLines val="0"/>
-        </c:dLbls>
-        <c:gapWidth val="90"/>
-        <c:overlap val="0"/>
-        <c:axId val="2094734554"/>
-        <c:axId val="2094734552"/>
-        <c:axId val="2094734556"/>
-      </c:barChart>
-      <c:lineChart>
-        <c:varyColors val="0"/>
-        <c:ser>
-          <c:idx val="3"/>
-          <c:order val="3"/>
-          <c:tx>
-            <c:strRef>
-              <c:f>Sheet1!$E$1</c:f>
-              <c:strCache>
-                <c:ptCount val="1"/>
-                <c:pt idx="0">
-                  <c:v>Baseline (Recompute = 1.0)</c:v>
-                </c:pt>
-              </c:strCache>
-            </c:strRef>
-          </c:tx>
-          <c:spPr>
-            <a:solidFill>
-              <a:srgbClr val="1A1A1A"/>
-            </a:solidFill>
-            <a:ln w="19050" cap="flat">
-              <a:solidFill>
-                <a:srgbClr val="1A1A1A"/>
-              </a:solidFill>
-              <a:prstDash val="dash"/>
-              <a:round/>
-            </a:ln>
-            <a:effectLst/>
-          </c:spPr>
-          <c:invertIfNegative val="0"/>
-          <c:dLbls>
-            <c:numFmt formatCode="#,##0" sourceLinked="0"/>
-            <c:txPr>
-              <a:bodyPr/>
-              <a:lstStyle/>
-              <a:p>
-                <a:pPr>
-                  <a:defRPr b="0" i="0" strike="noStrike" sz="1200" u="none">
-                    <a:solidFill>
-                      <a:srgbClr val="000000"/>
-                    </a:solidFill>
-                    <a:latin typeface="Arial"/>
-                  </a:defRPr>
-                </a:pPr>
-              </a:p>
-            </c:txPr>
-            <c:showLegendKey val="0"/>
-            <c:showVal val="0"/>
-            <c:showCatName val="0"/>
-            <c:showSerName val="0"/>
-            <c:showPercent val="0"/>
-            <c:showBubbleSize val="0"/>
-            <c:showLeaderLines val="0"/>
-          </c:dLbls>
-          <c:marker>
-            <c:symbol val="none"/>
-            <c:size val="6"/>
-            <c:spPr>
-              <a:solidFill>
-                <a:srgbClr val="1A1A1A"/>
-              </a:solidFill>
-              <a:ln w="9525" cap="flat">
-                <a:solidFill>
-                  <a:srgbClr val="1A1A1A"/>
-                </a:solidFill>
-                <a:prstDash val="solid"/>
-                <a:round/>
-              </a:ln>
-              <a:effectLst/>
-            </c:spPr>
-          </c:marker>
-          <c:cat>
-            <c:multiLvlStrRef>
-              <c:f>Sheet1!$A$2:$A$4</c:f>
-              <c:multiLvlStrCache>
-                <c:ptCount val="3"/>
-                <c:lvl>
-                  <c:pt idx="0">
-                    <c:v>Llama-3.1-8B</c:v>
-                  </c:pt>
-                  <c:pt idx="1">
-                    <c:v>Llama-2-13B</c:v>
-                  </c:pt>
-                  <c:pt idx="2">
-                    <c:v>Qwen3-14B</c:v>
-                  </c:pt>
-                </c:lvl>
-              </c:multiLvlStrCache>
-            </c:multiLvlStrRef>
-          </c:cat>
-          <c:val>
-            <c:numRef>
-              <c:f>Sheet1!$E$2:$E$4</c:f>
-              <c:numCache>
-                <c:formatCode>General</c:formatCode>
-                <c:ptCount val="3"/>
-                <c:pt idx="0">
-                  <c:v>1</c:v>
-                </c:pt>
-                <c:pt idx="1">
-                  <c:v>1</c:v>
-                </c:pt>
-                <c:pt idx="2">
-                  <c:v>1</c:v>
-                </c:pt>
-              </c:numCache>
-            </c:numRef>
-          </c:val>
-          <c:smooth val="0"/>
-        </c:ser>
-        <c:dLbls>
-          <c:numFmt formatCode="#,##0" sourceLinked="0"/>
-          <c:txPr>
-            <a:bodyPr/>
-            <a:lstStyle/>
-            <a:p>
-              <a:pPr>
-                <a:defRPr b="0" i="0" strike="noStrike" sz="1200" u="none">
-                  <a:solidFill>
-                    <a:srgbClr val="000000"/>
-                  </a:solidFill>
-                  <a:latin typeface="Arial"/>
-                </a:defRPr>
-              </a:pPr>
-            </a:p>
-          </c:txPr>
-          <c:showLegendKey val="0"/>
-          <c:showVal val="0"/>
-          <c:showCatName val="0"/>
-          <c:showSerName val="0"/>
-          <c:showPercent val="0"/>
-          <c:showBubbleSize val="0"/>
-          <c:showLeaderLines val="0"/>
-        </c:dLbls>
-        <c:marker val="1"/>
-        <c:axId val="2094734554"/>
-        <c:axId val="2094734552"/>
-        <c:axId val="2094734556"/>
-      </c:lineChart>
-      <c:catAx>
-        <c:axId val="2094734554"/>
-        <c:scaling>
-          <c:orientation val="minMax"/>
-        </c:scaling>
-        <c:delete val="0"/>
-        <c:axPos val="b"/>
-        <c:numFmt formatCode="General" sourceLinked="1"/>
-        <c:majorTickMark val="out"/>
-        <c:minorTickMark val="none"/>
-        <c:tickLblPos val="low"/>
-        <c:spPr>
-          <a:ln w="12700" cap="flat">
-            <a:solidFill>
-              <a:srgbClr val="888888"/>
-            </a:solidFill>
-            <a:prstDash val="solid"/>
-            <a:round/>
-          </a:ln>
-        </c:spPr>
-        <c:txPr>
-          <a:bodyPr/>
-          <a:lstStyle/>
-          <a:p>
-            <a:pPr>
-              <a:defRPr sz="1000" b="0" i="0" u="none" strike="noStrike">
-                <a:solidFill>
-                  <a:srgbClr val="595959"/>
-                </a:solidFill>
-                <a:latin typeface="Times New Roman"/>
-              </a:defRPr>
-            </a:pPr>
-            <a:endParaRPr lang="en-US"/>
-          </a:p>
-        </c:txPr>
-        <c:crossAx val="2094734552"/>
-        <c:crosses val="autoZero"/>
-        <c:auto val="1"/>
-        <c:lblAlgn val="ctr"/>
-        <c:noMultiLvlLbl val="1"/>
-      </c:catAx>
-      <c:valAx>
-        <c:axId val="2094734552"/>
-        <c:scaling>
-          <c:orientation val="minMax"/>
-          <c:max val="1.25"/>
-          <c:min val="0"/>
-        </c:scaling>
-        <c:delete val="0"/>
-        <c:axPos val="l"/>
-        <c:majorGridlines>
-          <c:spPr>
-            <a:ln w="9525" cap="flat">
-              <a:solidFill>
-                <a:srgbClr val="D9D9D9"/>
-              </a:solidFill>
-              <a:prstDash val="solid"/>
-              <a:round/>
-            </a:ln>
-          </c:spPr>
-        </c:majorGridlines>
-        <c:title>
-          <c:tx>
-            <c:rich>
-              <a:bodyPr/>
-              <a:lstStyle/>
-              <a:p>
-                <a:pPr>
-                  <a:defRPr sz="1100" b="0" i="0" u="none" strike="noStrike">
-                    <a:solidFill>
-                      <a:srgbClr val="000000"/>
-                    </a:solidFill>
-                    <a:latin typeface="Times New Roman"/>
-                  </a:defRPr>
-                </a:pPr>
-                <a:r>
-                  <a:rPr sz="1100" b="0" i="0" u="none" strike="noStrike">
-                    <a:solidFill>
-                      <a:srgbClr val="000000"/>
-                    </a:solidFill>
-                    <a:latin typeface="Times New Roman"/>
-                  </a:rPr>
-                  <a:t>Normalized Throughput</a:t>
-                </a:r>
-              </a:p>
-            </c:rich>
-          </c:tx>
-          <c:layout/>
-          <c:overlay val="0"/>
-        </c:title>
-        <c:numFmt formatCode="General" sourceLinked="0"/>
-        <c:majorTickMark val="out"/>
-        <c:minorTickMark val="none"/>
-        <c:tickLblPos val="nextTo"/>
-        <c:spPr>
-          <a:ln w="12700" cap="flat">
-            <a:solidFill>
-              <a:srgbClr val="888888"/>
-            </a:solidFill>
-            <a:prstDash val="solid"/>
-            <a:round/>
-          </a:ln>
-        </c:spPr>
-        <c:txPr>
-          <a:bodyPr/>
-          <a:lstStyle/>
-          <a:p>
-            <a:pPr>
-              <a:defRPr sz="1000" b="0" i="0" u="none" strike="noStrike">
-                <a:solidFill>
-                  <a:srgbClr val="595959"/>
-                </a:solidFill>
-                <a:latin typeface="Times New Roman"/>
-              </a:defRPr>
-            </a:pPr>
-            <a:endParaRPr lang="en-US"/>
-          </a:p>
-        </c:txPr>
-        <c:crossAx val="2094734554"/>
-        <c:crosses val="autoZero"/>
-        <c:crossBetween val="between"/>
-        <c:majorUnit val="0.25"/>
-      </c:valAx>
-      <c:spPr>
-        <a:noFill/>
-        <a:ln>
-          <a:noFill/>
-        </a:ln>
-        <a:effectLst/>
-      </c:spPr>
-    </c:plotArea>
-    <c:plotVisOnly val="1"/>
-    <c:dispBlanksAs val="span"/>
-  </c:chart>
-  <c:spPr>
-    <a:noFill/>
-    <a:ln>
-      <a:noFill/>
-    </a:ln>
-    <a:effectLst/>
-  </c:spPr>
-  <c:externalData r:id="rId1">
-    <c:autoUpdate val="0"/>
-  </c:externalData>
-</c:chartSpace>
-</file>
-
-<file path=ppt/charts/chart4.xml><?xml version="1.0" encoding="utf-8"?>
-<c:chartSpace xmlns:c="http://schemas.openxmlformats.org/drawingml/2006/chart" xmlns:a="http://schemas.openxmlformats.org/drawingml/2006/main" xmlns:r="http://schemas.openxmlformats.org/officeDocument/2006/relationships">
-  <c:date1904 val="0"/>
-  <c:roundedCorners val="1"/>
-  <c:chart>
-    <c:title>
-      <c:tx>
-        <c:rich>
-          <a:bodyPr/>
-          <a:lstStyle/>
-          <a:p>
-            <a:pPr>
-              <a:defRPr sz="1300" b="0" i="0" u="none" strike="noStrike">
-                <a:solidFill>
-                  <a:srgbClr val="1A1A1A"/>
-                </a:solidFill>
-                <a:latin typeface="Times New Roman"/>
-              </a:defRPr>
-            </a:pPr>
-            <a:r>
-              <a:rPr sz="1300" b="0" i="0" u="none" strike="noStrike">
-                <a:solidFill>
-                  <a:srgbClr val="1A1A1A"/>
-                </a:solidFill>
-                <a:latin typeface="Times New Roman"/>
-              </a:rPr>
-              <a:t>(d)  Host memory</a:t>
+              <a:t>(c)  Host memory</a:t>
             </a:r>
           </a:p>
         </c:rich>
@@ -3101,8 +2495,8 @@
           <p:nvPr/>
         </p:nvGraphicFramePr>
         <p:xfrm>
-          <a:off x="411480" y="1051560"/>
-          <a:ext cx="2761488" cy="3931920"/>
+          <a:off x="640080" y="1051560"/>
+          <a:ext cx="3520440" cy="3931920"/>
         </p:xfrm>
         <a:graphic xmlns:a="http://schemas.openxmlformats.org/drawingml/2006/main">
           <a:graphicData uri="http://schemas.openxmlformats.org/drawingml/2006/chart">
@@ -3118,8 +2512,8 @@
         </p:nvSpPr>
         <p:spPr>
           <a:xfrm>
-            <a:off x="667512" y="1435608"/>
-            <a:ext cx="828446" cy="256032"/>
+            <a:off x="896112" y="1435608"/>
+            <a:ext cx="1056132" cy="256032"/>
           </a:xfrm>
           <a:prstGeom prst="rect">
             <a:avLst/>
@@ -3157,8 +2551,8 @@
         </p:nvSpPr>
         <p:spPr>
           <a:xfrm>
-            <a:off x="1514368" y="1435608"/>
-            <a:ext cx="828446" cy="256032"/>
+            <a:off x="1975714" y="1435608"/>
+            <a:ext cx="1056132" cy="256032"/>
           </a:xfrm>
           <a:prstGeom prst="rect">
             <a:avLst/>
@@ -3196,8 +2590,8 @@
         </p:nvSpPr>
         <p:spPr>
           <a:xfrm>
-            <a:off x="2361225" y="1435608"/>
-            <a:ext cx="828446" cy="256032"/>
+            <a:off x="3055315" y="1435608"/>
+            <a:ext cx="1056132" cy="256032"/>
           </a:xfrm>
           <a:prstGeom prst="rect">
             <a:avLst/>
@@ -3234,8 +2628,8 @@
           <p:nvPr/>
         </p:nvGraphicFramePr>
         <p:xfrm>
-          <a:off x="3291840" y="1051560"/>
-          <a:ext cx="2761488" cy="3931920"/>
+          <a:off x="4389120" y="1051560"/>
+          <a:ext cx="3520440" cy="3931920"/>
         </p:xfrm>
         <a:graphic xmlns:a="http://schemas.openxmlformats.org/drawingml/2006/main">
           <a:graphicData uri="http://schemas.openxmlformats.org/drawingml/2006/chart">
@@ -3251,8 +2645,8 @@
         </p:nvSpPr>
         <p:spPr>
           <a:xfrm>
-            <a:off x="3547872" y="1435608"/>
-            <a:ext cx="828446" cy="256032"/>
+            <a:off x="4645152" y="1435608"/>
+            <a:ext cx="1056132" cy="256032"/>
           </a:xfrm>
           <a:prstGeom prst="rect">
             <a:avLst/>
@@ -3290,8 +2684,8 @@
         </p:nvSpPr>
         <p:spPr>
           <a:xfrm>
-            <a:off x="4394728" y="1435608"/>
-            <a:ext cx="828446" cy="256032"/>
+            <a:off x="5724754" y="1435608"/>
+            <a:ext cx="1056132" cy="256032"/>
           </a:xfrm>
           <a:prstGeom prst="rect">
             <a:avLst/>
@@ -3329,8 +2723,8 @@
         </p:nvSpPr>
         <p:spPr>
           <a:xfrm>
-            <a:off x="5241585" y="1435608"/>
-            <a:ext cx="828446" cy="256032"/>
+            <a:off x="6804355" y="1435608"/>
+            <a:ext cx="1056132" cy="256032"/>
           </a:xfrm>
           <a:prstGeom prst="rect">
             <a:avLst/>
@@ -3367,8 +2761,8 @@
           <p:nvPr/>
         </p:nvGraphicFramePr>
         <p:xfrm>
-          <a:off x="6172200" y="1051560"/>
-          <a:ext cx="2761488" cy="3931920"/>
+          <a:off x="8138160" y="1051560"/>
+          <a:ext cx="3520440" cy="3931920"/>
         </p:xfrm>
         <a:graphic xmlns:a="http://schemas.openxmlformats.org/drawingml/2006/main">
           <a:graphicData uri="http://schemas.openxmlformats.org/drawingml/2006/chart">
@@ -3384,141 +2778,8 @@
         </p:nvSpPr>
         <p:spPr>
           <a:xfrm>
-            <a:off x="6428232" y="1435608"/>
-            <a:ext cx="828446" cy="256032"/>
-          </a:xfrm>
-          <a:prstGeom prst="rect">
-            <a:avLst/>
-          </a:prstGeom>
-          <a:noFill/>
-          <a:ln/>
-        </p:spPr>
-        <p:txBody>
-          <a:bodyPr wrap="square" lIns="0" tIns="0" rIns="0" bIns="0" rtlCol="0" anchor="ctr"/>
-          <a:lstStyle/>
-          <a:p>
-            <a:pPr algn="ctr" indent="0" marL="0">
-              <a:buNone/>
-            </a:pPr>
-            <a:r>
-              <a:rPr lang="en-US" sz="1200" b="1" dirty="0">
-                <a:solidFill>
-                  <a:srgbClr val="1A1A1A"/>
-                </a:solidFill>
-                <a:latin typeface="Times New Roman" pitchFamily="34" charset="0"/>
-                <a:ea typeface="Times New Roman" pitchFamily="34" charset="-122"/>
-                <a:cs typeface="Times New Roman" pitchFamily="34" charset="-120"/>
-              </a:rPr>
-              <a:t>0.99×</a:t>
-            </a:r>
-            <a:endParaRPr lang="en-US" sz="1200" dirty="0"/>
-          </a:p>
-        </p:txBody>
-      </p:sp>
-      <p:sp>
-        <p:nvSpPr>
-          <p:cNvPr id="14" name="Text 9"/>
-          <p:cNvSpPr/>
-          <p:nvPr/>
-        </p:nvSpPr>
-        <p:spPr>
-          <a:xfrm>
-            <a:off x="7275088" y="1435608"/>
-            <a:ext cx="828446" cy="256032"/>
-          </a:xfrm>
-          <a:prstGeom prst="rect">
-            <a:avLst/>
-          </a:prstGeom>
-          <a:noFill/>
-          <a:ln/>
-        </p:spPr>
-        <p:txBody>
-          <a:bodyPr wrap="square" lIns="0" tIns="0" rIns="0" bIns="0" rtlCol="0" anchor="ctr"/>
-          <a:lstStyle/>
-          <a:p>
-            <a:pPr algn="ctr" indent="0" marL="0">
-              <a:buNone/>
-            </a:pPr>
-            <a:r>
-              <a:rPr lang="en-US" sz="1200" b="1" dirty="0">
-                <a:solidFill>
-                  <a:srgbClr val="1A1A1A"/>
-                </a:solidFill>
-                <a:latin typeface="Times New Roman" pitchFamily="34" charset="0"/>
-                <a:ea typeface="Times New Roman" pitchFamily="34" charset="-122"/>
-                <a:cs typeface="Times New Roman" pitchFamily="34" charset="-120"/>
-              </a:rPr>
-              <a:t>1.00×</a:t>
-            </a:r>
-            <a:endParaRPr lang="en-US" sz="1200" dirty="0"/>
-          </a:p>
-        </p:txBody>
-      </p:sp>
-      <p:sp>
-        <p:nvSpPr>
-          <p:cNvPr id="15" name="Text 10"/>
-          <p:cNvSpPr/>
-          <p:nvPr/>
-        </p:nvSpPr>
-        <p:spPr>
-          <a:xfrm>
-            <a:off x="8121945" y="1435608"/>
-            <a:ext cx="828446" cy="256032"/>
-          </a:xfrm>
-          <a:prstGeom prst="rect">
-            <a:avLst/>
-          </a:prstGeom>
-          <a:noFill/>
-          <a:ln/>
-        </p:spPr>
-        <p:txBody>
-          <a:bodyPr wrap="square" lIns="0" tIns="0" rIns="0" bIns="0" rtlCol="0" anchor="ctr"/>
-          <a:lstStyle/>
-          <a:p>
-            <a:pPr algn="ctr" indent="0" marL="0">
-              <a:buNone/>
-            </a:pPr>
-            <a:r>
-              <a:rPr lang="en-US" sz="1200" b="1" dirty="0">
-                <a:solidFill>
-                  <a:srgbClr val="1A1A1A"/>
-                </a:solidFill>
-                <a:latin typeface="Times New Roman" pitchFamily="34" charset="0"/>
-                <a:ea typeface="Times New Roman" pitchFamily="34" charset="-122"/>
-                <a:cs typeface="Times New Roman" pitchFamily="34" charset="-120"/>
-              </a:rPr>
-              <a:t>1.00×</a:t>
-            </a:r>
-            <a:endParaRPr lang="en-US" sz="1200" dirty="0"/>
-          </a:p>
-        </p:txBody>
-      </p:sp>
-      <p:graphicFrame>
-        <p:nvGraphicFramePr>
-          <p:cNvPr id="16" name="Chart 3" descr=""/>
-          <p:cNvGraphicFramePr/>
-          <p:nvPr/>
-        </p:nvGraphicFramePr>
-        <p:xfrm>
-          <a:off x="9052560" y="1051560"/>
-          <a:ext cx="2761488" cy="3931920"/>
-        </p:xfrm>
-        <a:graphic xmlns:a="http://schemas.openxmlformats.org/drawingml/2006/main">
-          <a:graphicData uri="http://schemas.openxmlformats.org/drawingml/2006/chart">
-            <c:chart xmlns:c="http://schemas.openxmlformats.org/drawingml/2006/chart" r:id="rId4"/>
-          </a:graphicData>
-        </a:graphic>
-      </p:graphicFrame>
-      <p:sp>
-        <p:nvSpPr>
-          <p:cNvPr id="17" name="Text 11"/>
-          <p:cNvSpPr/>
-          <p:nvPr/>
-        </p:nvSpPr>
-        <p:spPr>
-          <a:xfrm>
-            <a:off x="9308592" y="1435608"/>
-            <a:ext cx="828446" cy="256032"/>
+            <a:off x="8394192" y="1435608"/>
+            <a:ext cx="1056132" cy="256032"/>
           </a:xfrm>
           <a:prstGeom prst="rect">
             <a:avLst/>
@@ -3550,14 +2811,14 @@
       </p:sp>
       <p:sp>
         <p:nvSpPr>
-          <p:cNvPr id="18" name="Text 12"/>
+          <p:cNvPr id="14" name="Text 9"/>
           <p:cNvSpPr/>
           <p:nvPr/>
         </p:nvSpPr>
         <p:spPr>
           <a:xfrm>
-            <a:off x="10155448" y="1435608"/>
-            <a:ext cx="828446" cy="256032"/>
+            <a:off x="9473794" y="1435608"/>
+            <a:ext cx="1056132" cy="256032"/>
           </a:xfrm>
           <a:prstGeom prst="rect">
             <a:avLst/>
@@ -3589,14 +2850,14 @@
       </p:sp>
       <p:sp>
         <p:nvSpPr>
-          <p:cNvPr id="19" name="Text 13"/>
+          <p:cNvPr id="15" name="Text 10"/>
           <p:cNvSpPr/>
           <p:nvPr/>
         </p:nvSpPr>
         <p:spPr>
           <a:xfrm>
-            <a:off x="11002305" y="1435608"/>
-            <a:ext cx="828446" cy="256032"/>
+            <a:off x="10553395" y="1435608"/>
+            <a:ext cx="1056132" cy="256032"/>
           </a:xfrm>
           <a:prstGeom prst="rect">
             <a:avLst/>
@@ -3628,7 +2889,7 @@
       </p:sp>
       <p:sp>
         <p:nvSpPr>
-          <p:cNvPr id="20" name="Shape 14"/>
+          <p:cNvPr id="16" name="Shape 11"/>
           <p:cNvSpPr/>
           <p:nvPr/>
         </p:nvSpPr>
@@ -3653,7 +2914,7 @@
       </p:sp>
       <p:sp>
         <p:nvSpPr>
-          <p:cNvPr id="21" name="Text 15"/>
+          <p:cNvPr id="17" name="Text 12"/>
           <p:cNvSpPr/>
           <p:nvPr/>
         </p:nvSpPr>
@@ -3692,7 +2953,7 @@
       </p:sp>
       <p:sp>
         <p:nvSpPr>
-          <p:cNvPr id="22" name="Shape 16"/>
+          <p:cNvPr id="18" name="Shape 13"/>
           <p:cNvSpPr/>
           <p:nvPr/>
         </p:nvSpPr>
@@ -3717,7 +2978,7 @@
       </p:sp>
       <p:sp>
         <p:nvSpPr>
-          <p:cNvPr id="23" name="Text 17"/>
+          <p:cNvPr id="19" name="Text 14"/>
           <p:cNvSpPr/>
           <p:nvPr/>
         </p:nvSpPr>
@@ -3756,7 +3017,7 @@
       </p:sp>
       <p:sp>
         <p:nvSpPr>
-          <p:cNvPr id="24" name="Shape 18"/>
+          <p:cNvPr id="20" name="Shape 15"/>
           <p:cNvSpPr/>
           <p:nvPr/>
         </p:nvSpPr>
@@ -3781,7 +3042,7 @@
       </p:sp>
       <p:sp>
         <p:nvSpPr>
-          <p:cNvPr id="25" name="Text 19"/>
+          <p:cNvPr id="21" name="Text 16"/>
           <p:cNvSpPr/>
           <p:nvPr/>
         </p:nvSpPr>
@@ -3820,7 +3081,7 @@
       </p:sp>
       <p:sp>
         <p:nvSpPr>
-          <p:cNvPr id="26" name="Text 20"/>
+          <p:cNvPr id="22" name="Text 17"/>
           <p:cNvSpPr/>
           <p:nvPr/>
         </p:nvSpPr>
@@ -3851,7 +3112,7 @@
                 <a:ea typeface="Times New Roman" pitchFamily="34" charset="-122"/>
                 <a:cs typeface="Times New Roman" pitchFamily="34" charset="-120"/>
               </a:rPr>
-              <a:t>Hit rate and host DRAM improve on all three models. Throughput is flat by construction — the benchmark is closed-loop, so every arm does the same work in the same wall time. Normalized TTFT is the exception on Llama-2-13B (0.95×): its 4096-position limit caps conversations at four turns, so the re-prefill a hit avoids is small enough that the fetch does not pay for itself — the mechanism still works there (1.66× hit rate), it just has less to win.</a:t>
+              <a:t>Hit rate and host DRAM improve on all three models. Normalized TTFT is the exception on Llama-2-13B (0.95×): its 4096-position limit caps conversations at four turns, so the re-prefill a hit avoids is small enough that the fetch does not pay for itself — the mechanism still works there (1.66× hit rate), it just has less to win.</a:t>
             </a:r>
             <a:endParaRPr lang="en-US" sz="1100" dirty="0"/>
           </a:p>
